--- a/classes/parte-5-explotacion-de-sistemas-y-binarios/127-heap-use-after-free-y-double-free/clase-127-presentacion.pptx
+++ b/classes/parte-5-explotacion-de-sistemas-y-binarios/127-heap-use-after-free-y-double-free/clase-127-presentacion.pptx
@@ -17,6 +17,8 @@
     <p:sldId id="265" r:id="rId16"/>
     <p:sldId id="266" r:id="rId17"/>
     <p:sldId id="267" r:id="rId18"/>
+    <p:sldId id="268" r:id="rId19"/>
+    <p:sldId id="269" r:id="rId20"/>
   </p:sldIdLst>
   <p:sldSz cx="9144000" cy="6858000" type="screen4x3"/>
   <p:notesSz cx="6858000" cy="9144000"/>
@@ -3198,7 +3200,7 @@
                   <a:srgbClr val="0B3D2E"/>
                 </a:solidFill>
               </a:rPr>
-              <a:t>⚠️ Errores comunes</a:t>
+              <a:t>📝 Reto verificable</a:t>
             </a:r>
           </a:p>
         </p:txBody>
@@ -3236,67 +3238,52 @@
                   <a:srgbClr val="22282E"/>
                 </a:solidFill>
               </a:rPr>
-              <a:t>•  free(): double free detected in tcache 2 — tcache key activa; falséala o usa fastbin</a:t>
-            </a:r>
-          </a:p>
-          <a:p>
-            <a:pPr>
-              <a:spcAft>
-                <a:spcPts val="600"/>
-              </a:spcAft>
-            </a:pPr>
-            <a:r>
-              <a:rPr sz="1500">
-                <a:solidFill>
-                  <a:srgbClr val="22282E"/>
-                </a:solidFill>
-              </a:rPr>
-              <a:t>•  El poisoning no cambia malloc — El next mal alineado o tamaño de bin incorrecto</a:t>
-            </a:r>
-          </a:p>
-          <a:p>
-            <a:pPr>
-              <a:spcAft>
-                <a:spcPts val="600"/>
-              </a:spcAft>
-            </a:pPr>
-            <a:r>
-              <a:rPr sz="1500">
-                <a:solidFill>
-                  <a:srgbClr val="22282E"/>
-                </a:solidFill>
-              </a:rPr>
-              <a:t>•  Crash al liberar chunk falso — Metadatos inválidos; ajusta size y alineación</a:t>
-            </a:r>
-          </a:p>
-          <a:p>
-            <a:pPr>
-              <a:spcAft>
-                <a:spcPts val="600"/>
-              </a:spcAft>
-            </a:pPr>
-            <a:r>
-              <a:rPr sz="1500">
-                <a:solidFill>
-                  <a:srgbClr val="22282E"/>
-                </a:solidFill>
-              </a:rPr>
-              <a:t>•  freehook no existe — glibc ≥2.34; apunta a GOT/estructuras alternativas</a:t>
-            </a:r>
-          </a:p>
-          <a:p>
-            <a:pPr>
-              <a:spcAft>
-                <a:spcPts val="600"/>
-              </a:spcAft>
-            </a:pPr>
-            <a:r>
-              <a:rPr sz="1500">
-                <a:solidFill>
-                  <a:srgbClr val="22282E"/>
-                </a:solidFill>
-              </a:rPr>
-              <a:t>•  ASan no detecta nada — No compilaste con -fsanitize=address</a:t>
+              <a:t>•  En un binario de reto con UAF/double free, logra que un malloc devuelva una dirección que tú elijas</a:t>
+            </a:r>
+          </a:p>
+          <a:p>
+            <a:pPr>
+              <a:spcAft>
+                <a:spcPts val="600"/>
+              </a:spcAft>
+            </a:pPr>
+            <a:r>
+              <a:rPr sz="1500">
+                <a:solidFill>
+                  <a:srgbClr val="22282E"/>
+                </a:solidFill>
+              </a:rPr>
+              <a:t>•  mediante tcache poisoning.</a:t>
+            </a:r>
+          </a:p>
+          <a:p>
+            <a:pPr>
+              <a:spcAft>
+                <a:spcPts val="600"/>
+              </a:spcAft>
+            </a:pPr>
+            <a:r>
+              <a:rPr sz="1500">
+                <a:solidFill>
+                  <a:srgbClr val="22282E"/>
+                </a:solidFill>
+              </a:rPr>
+              <a:t>•  Criterio de aceptación: demuestras en GDB que un malloc retorna la dirección objetivo, y (si el</a:t>
+            </a:r>
+          </a:p>
+          <a:p>
+            <a:pPr>
+              <a:spcAft>
+                <a:spcPts val="600"/>
+              </a:spcAft>
+            </a:pPr>
+            <a:r>
+              <a:rPr sz="1500">
+                <a:solidFill>
+                  <a:srgbClr val="22282E"/>
+                </a:solidFill>
+              </a:rPr>
+              <a:t>•  reto lo permite) obtienes ejecución de código o lectura de la flag.</a:t>
             </a:r>
           </a:p>
         </p:txBody>
@@ -3347,7 +3334,7 @@
                   <a:srgbClr val="0B3D2E"/>
                 </a:solidFill>
               </a:rPr>
-              <a:t>❓ Preguntas frecuentes</a:t>
+              <a:t>⚠️ Errores comunes</a:t>
             </a:r>
           </a:p>
         </p:txBody>
@@ -3385,82 +3372,67 @@
                   <a:srgbClr val="22282E"/>
                 </a:solidFill>
               </a:rPr>
-              <a:t>•  ❓ ¿UAF siempre da RCE? No siempre; depende de si el objeto reasignado contiene punteros de función</a:t>
-            </a:r>
-          </a:p>
-          <a:p>
-            <a:pPr>
-              <a:spcAft>
-                <a:spcPts val="600"/>
-              </a:spcAft>
-            </a:pPr>
-            <a:r>
-              <a:rPr sz="1500">
-                <a:solidFill>
-                  <a:srgbClr val="22282E"/>
-                </a:solidFill>
-              </a:rPr>
-              <a:t>•  o datos sensibles.</a:t>
-            </a:r>
-          </a:p>
-          <a:p>
-            <a:pPr>
-              <a:spcAft>
-                <a:spcPts val="600"/>
-              </a:spcAft>
-            </a:pPr>
-            <a:r>
-              <a:rPr sz="1500">
-                <a:solidFill>
-                  <a:srgbClr val="22282E"/>
-                </a:solidFill>
-              </a:rPr>
-              <a:t>•  ❓ ¿Sigue funcionando el ataque a freehook? No en glibc ≥2.34 (los hooks fueron eliminados);</a:t>
-            </a:r>
-          </a:p>
-          <a:p>
-            <a:pPr>
-              <a:spcAft>
-                <a:spcPts val="600"/>
-              </a:spcAft>
-            </a:pPr>
-            <a:r>
-              <a:rPr sz="1500">
-                <a:solidFill>
-                  <a:srgbClr val="22282E"/>
-                </a:solidFill>
-              </a:rPr>
-              <a:t>•  hay que buscar objetivos modernos.</a:t>
-            </a:r>
-          </a:p>
-          <a:p>
-            <a:pPr>
-              <a:spcAft>
-                <a:spcPts val="600"/>
-              </a:spcAft>
-            </a:pPr>
-            <a:r>
-              <a:rPr sz="1500">
-                <a:solidFill>
-                  <a:srgbClr val="22282E"/>
-                </a:solidFill>
-              </a:rPr>
-              <a:t>•  ❓ ¿Cómo evito estos bugs al programar? Pon punteros a NULL tras free, usa smart pointers en</a:t>
-            </a:r>
-          </a:p>
-          <a:p>
-            <a:pPr>
-              <a:spcAft>
-                <a:spcPts val="600"/>
-              </a:spcAft>
-            </a:pPr>
-            <a:r>
-              <a:rPr sz="1500">
-                <a:solidFill>
-                  <a:srgbClr val="22282E"/>
-                </a:solidFill>
-              </a:rPr>
-              <a:t>•  C++ y compila con ASan en CI.</a:t>
+              <a:t>•  free(): double free detected in tcache 2 — tcache key activa; falséala o usa fastbin</a:t>
+            </a:r>
+          </a:p>
+          <a:p>
+            <a:pPr>
+              <a:spcAft>
+                <a:spcPts val="600"/>
+              </a:spcAft>
+            </a:pPr>
+            <a:r>
+              <a:rPr sz="1500">
+                <a:solidFill>
+                  <a:srgbClr val="22282E"/>
+                </a:solidFill>
+              </a:rPr>
+              <a:t>•  El poisoning no cambia malloc — El next mal alineado o tamaño de bin incorrecto</a:t>
+            </a:r>
+          </a:p>
+          <a:p>
+            <a:pPr>
+              <a:spcAft>
+                <a:spcPts val="600"/>
+              </a:spcAft>
+            </a:pPr>
+            <a:r>
+              <a:rPr sz="1500">
+                <a:solidFill>
+                  <a:srgbClr val="22282E"/>
+                </a:solidFill>
+              </a:rPr>
+              <a:t>•  Crash al liberar chunk falso — Metadatos inválidos; ajusta size y alineación</a:t>
+            </a:r>
+          </a:p>
+          <a:p>
+            <a:pPr>
+              <a:spcAft>
+                <a:spcPts val="600"/>
+              </a:spcAft>
+            </a:pPr>
+            <a:r>
+              <a:rPr sz="1500">
+                <a:solidFill>
+                  <a:srgbClr val="22282E"/>
+                </a:solidFill>
+              </a:rPr>
+              <a:t>•  freehook no existe — glibc ≥2.34; apunta a GOT/estructuras alternativas</a:t>
+            </a:r>
+          </a:p>
+          <a:p>
+            <a:pPr>
+              <a:spcAft>
+                <a:spcPts val="600"/>
+              </a:spcAft>
+            </a:pPr>
+            <a:r>
+              <a:rPr sz="1500">
+                <a:solidFill>
+                  <a:srgbClr val="22282E"/>
+                </a:solidFill>
+              </a:rPr>
+              <a:t>•  ASan no detecta nada — No compilaste con -fsanitize=address</a:t>
             </a:r>
           </a:p>
         </p:txBody>
@@ -3511,7 +3483,7 @@
                   <a:srgbClr val="0B3D2E"/>
                 </a:solidFill>
               </a:rPr>
-              <a:t>🔗 Referencias</a:t>
+              <a:t>❓ Preguntas frecuentes</a:t>
             </a:r>
           </a:p>
         </p:txBody>
@@ -3549,6 +3521,170 @@
                   <a:srgbClr val="22282E"/>
                 </a:solidFill>
               </a:rPr>
+              <a:t>•  ❓ ¿UAF siempre da RCE? No siempre; depende de si el objeto reasignado contiene punteros de función</a:t>
+            </a:r>
+          </a:p>
+          <a:p>
+            <a:pPr>
+              <a:spcAft>
+                <a:spcPts val="600"/>
+              </a:spcAft>
+            </a:pPr>
+            <a:r>
+              <a:rPr sz="1500">
+                <a:solidFill>
+                  <a:srgbClr val="22282E"/>
+                </a:solidFill>
+              </a:rPr>
+              <a:t>•  o datos sensibles.</a:t>
+            </a:r>
+          </a:p>
+          <a:p>
+            <a:pPr>
+              <a:spcAft>
+                <a:spcPts val="600"/>
+              </a:spcAft>
+            </a:pPr>
+            <a:r>
+              <a:rPr sz="1500">
+                <a:solidFill>
+                  <a:srgbClr val="22282E"/>
+                </a:solidFill>
+              </a:rPr>
+              <a:t>•  ❓ ¿Sigue funcionando el ataque a freehook? No en glibc ≥2.34 (los hooks fueron eliminados);</a:t>
+            </a:r>
+          </a:p>
+          <a:p>
+            <a:pPr>
+              <a:spcAft>
+                <a:spcPts val="600"/>
+              </a:spcAft>
+            </a:pPr>
+            <a:r>
+              <a:rPr sz="1500">
+                <a:solidFill>
+                  <a:srgbClr val="22282E"/>
+                </a:solidFill>
+              </a:rPr>
+              <a:t>•  hay que buscar objetivos modernos.</a:t>
+            </a:r>
+          </a:p>
+          <a:p>
+            <a:pPr>
+              <a:spcAft>
+                <a:spcPts val="600"/>
+              </a:spcAft>
+            </a:pPr>
+            <a:r>
+              <a:rPr sz="1500">
+                <a:solidFill>
+                  <a:srgbClr val="22282E"/>
+                </a:solidFill>
+              </a:rPr>
+              <a:t>•  ❓ ¿Cómo evito estos bugs al programar? Pon punteros a NULL tras free, usa smart pointers en</a:t>
+            </a:r>
+          </a:p>
+          <a:p>
+            <a:pPr>
+              <a:spcAft>
+                <a:spcPts val="600"/>
+              </a:spcAft>
+            </a:pPr>
+            <a:r>
+              <a:rPr sz="1500">
+                <a:solidFill>
+                  <a:srgbClr val="22282E"/>
+                </a:solidFill>
+              </a:rPr>
+              <a:t>•  C++ y compila con ASan en CI.</a:t>
+            </a:r>
+          </a:p>
+        </p:txBody>
+      </p:sp>
+    </p:spTree>
+  </p:cSld>
+  <p:clrMapOvr>
+    <a:masterClrMapping/>
+  </p:clrMapOvr>
+</p:sld>
+</file>
+
+<file path=ppt/slides/slide13.xml><?xml version="1.0" encoding="utf-8"?>
+<p:sld xmlns:a="http://schemas.openxmlformats.org/drawingml/2006/main" xmlns:p="http://schemas.openxmlformats.org/presentationml/2006/main" xmlns:r="http://schemas.openxmlformats.org/officeDocument/2006/relationships">
+  <p:cSld>
+    <p:spTree>
+      <p:nvGrpSpPr>
+        <p:cNvPr id="1" name=""/>
+        <p:cNvGrpSpPr/>
+        <p:nvPr/>
+      </p:nvGrpSpPr>
+      <p:grpSpPr/>
+      <p:sp>
+        <p:nvSpPr>
+          <p:cNvPr id="2" name="TextBox 1"/>
+          <p:cNvSpPr txBox="1"/>
+          <p:nvPr/>
+        </p:nvSpPr>
+        <p:spPr>
+          <a:xfrm>
+            <a:off x="457200" y="320040"/>
+            <a:ext cx="8229600" cy="822960"/>
+          </a:xfrm>
+          <a:prstGeom prst="rect">
+            <a:avLst/>
+          </a:prstGeom>
+          <a:noFill/>
+        </p:spPr>
+        <p:txBody>
+          <a:bodyPr wrap="square">
+            <a:spAutoFit/>
+          </a:bodyPr>
+          <a:lstStyle/>
+          <a:p>
+            <a:r>
+              <a:rPr sz="2600" b="1">
+                <a:solidFill>
+                  <a:srgbClr val="0B3D2E"/>
+                </a:solidFill>
+              </a:rPr>
+              <a:t>🔗 Referencias</a:t>
+            </a:r>
+          </a:p>
+        </p:txBody>
+      </p:sp>
+      <p:sp>
+        <p:nvSpPr>
+          <p:cNvPr id="3" name="TextBox 2"/>
+          <p:cNvSpPr txBox="1"/>
+          <p:nvPr/>
+        </p:nvSpPr>
+        <p:spPr>
+          <a:xfrm>
+            <a:off x="457200" y="1280160"/>
+            <a:ext cx="8229600" cy="4937760"/>
+          </a:xfrm>
+          <a:prstGeom prst="rect">
+            <a:avLst/>
+          </a:prstGeom>
+          <a:noFill/>
+        </p:spPr>
+        <p:txBody>
+          <a:bodyPr wrap="square">
+            <a:spAutoFit/>
+          </a:bodyPr>
+          <a:lstStyle/>
+          <a:p>
+            <a:pPr>
+              <a:spcAft>
+                <a:spcPts val="600"/>
+              </a:spcAft>
+            </a:pPr>
+            <a:r>
+              <a:rPr sz="1500">
+                <a:solidFill>
+                  <a:srgbClr val="22282E"/>
+                </a:solidFill>
+              </a:rPr>
               <a:t>•  CWE-416: Use After Free — &lt;https://cwe.mitre.org/data/definitions/416.html&gt;</a:t>
             </a:r>
           </a:p>
@@ -3599,6 +3735,81 @@
           </a:p>
         </p:txBody>
       </p:sp>
+    </p:spTree>
+  </p:cSld>
+  <p:clrMapOvr>
+    <a:masterClrMapping/>
+  </p:clrMapOvr>
+</p:sld>
+</file>
+
+<file path=ppt/slides/slide14.xml><?xml version="1.0" encoding="utf-8"?>
+<p:sld xmlns:a="http://schemas.openxmlformats.org/drawingml/2006/main" xmlns:p="http://schemas.openxmlformats.org/presentationml/2006/main" xmlns:r="http://schemas.openxmlformats.org/officeDocument/2006/relationships">
+  <p:cSld>
+    <p:spTree>
+      <p:nvGrpSpPr>
+        <p:cNvPr id="1" name=""/>
+        <p:cNvGrpSpPr/>
+        <p:nvPr/>
+      </p:nvGrpSpPr>
+      <p:grpSpPr/>
+      <p:sp>
+        <p:nvSpPr>
+          <p:cNvPr id="2" name="TextBox 1"/>
+          <p:cNvSpPr txBox="1"/>
+          <p:nvPr/>
+        </p:nvSpPr>
+        <p:spPr>
+          <a:xfrm>
+            <a:off x="457200" y="274320"/>
+            <a:ext cx="8229600" cy="640080"/>
+          </a:xfrm>
+          <a:prstGeom prst="rect">
+            <a:avLst/>
+          </a:prstGeom>
+          <a:noFill/>
+        </p:spPr>
+        <p:txBody>
+          <a:bodyPr wrap="square">
+            <a:spAutoFit/>
+          </a:bodyPr>
+          <a:lstStyle/>
+          <a:p>
+            <a:r>
+              <a:rPr sz="2200" b="1">
+                <a:solidFill>
+                  <a:srgbClr val="0B3D2E"/>
+                </a:solidFill>
+              </a:rPr>
+              <a:t>Diagrama de la clase</a:t>
+            </a:r>
+          </a:p>
+        </p:txBody>
+      </p:sp>
+      <p:pic>
+        <p:nvPicPr>
+          <p:cNvPr id="3" name="Picture 2" descr="fdc52ff2db25e214.png"/>
+          <p:cNvPicPr>
+            <a:picLocks noChangeAspect="1"/>
+          </p:cNvPicPr>
+          <p:nvPr/>
+        </p:nvPicPr>
+        <p:blipFill>
+          <a:blip r:embed="rId2"/>
+          <a:stretch>
+            <a:fillRect/>
+          </a:stretch>
+        </p:blipFill>
+        <p:spPr>
+          <a:xfrm>
+            <a:off x="3665078" y="1097280"/>
+            <a:ext cx="1813843" cy="5303520"/>
+          </a:xfrm>
+          <a:prstGeom prst="rect">
+            <a:avLst/>
+          </a:prstGeom>
+        </p:spPr>
+      </p:pic>
     </p:spTree>
   </p:cSld>
   <p:clrMapOvr>
@@ -4122,7 +4333,7 @@
                   <a:srgbClr val="0B3D2E"/>
                 </a:solidFill>
               </a:rPr>
-              <a:t>📖 Definiciones y características</a:t>
+              <a:t>🧠 Explicación en profundidad</a:t>
             </a:r>
           </a:p>
         </p:txBody>
@@ -4160,97 +4371,97 @@
                   <a:srgbClr val="22282E"/>
                 </a:solidFill>
               </a:rPr>
-              <a:t>•  Use-after-free: uso de memoria tras free. Clave: CWE-416; si el chunk se reasigna, escribes</a:t>
-            </a:r>
-          </a:p>
-          <a:p>
-            <a:pPr>
-              <a:spcAft>
-                <a:spcPts val="600"/>
-              </a:spcAft>
-            </a:pPr>
-            <a:r>
-              <a:rPr sz="1500">
-                <a:solidFill>
-                  <a:srgbClr val="22282E"/>
-                </a:solidFill>
-              </a:rPr>
-              <a:t>•  sobre otro objeto.</a:t>
-            </a:r>
-          </a:p>
-          <a:p>
-            <a:pPr>
-              <a:spcAft>
-                <a:spcPts val="600"/>
-              </a:spcAft>
-            </a:pPr>
-            <a:r>
-              <a:rPr sz="1500">
-                <a:solidFill>
-                  <a:srgbClr val="22282E"/>
-                </a:solidFill>
-              </a:rPr>
-              <a:t>•  Puntero colgante: referencia que sobrevive al free. Clave: no ponerlo a NULL es la causa</a:t>
-            </a:r>
-          </a:p>
-          <a:p>
-            <a:pPr>
-              <a:spcAft>
-                <a:spcPts val="600"/>
-              </a:spcAft>
-            </a:pPr>
-            <a:r>
-              <a:rPr sz="1500">
-                <a:solidFill>
-                  <a:srgbClr val="22282E"/>
-                </a:solidFill>
-              </a:rPr>
-              <a:t>•  típica.</a:t>
-            </a:r>
-          </a:p>
-          <a:p>
-            <a:pPr>
-              <a:spcAft>
-                <a:spcPts val="600"/>
-              </a:spcAft>
-            </a:pPr>
-            <a:r>
-              <a:rPr sz="1500">
-                <a:solidFill>
-                  <a:srgbClr val="22282E"/>
-                </a:solidFill>
-              </a:rPr>
-              <a:t>•  Double free: liberar dos veces el mismo puntero. Clave: corrompe la lista del bin, permitiendo</a:t>
-            </a:r>
-          </a:p>
-          <a:p>
-            <a:pPr>
-              <a:spcAft>
-                <a:spcPts val="600"/>
-              </a:spcAft>
-            </a:pPr>
-            <a:r>
-              <a:rPr sz="1500">
-                <a:solidFill>
-                  <a:srgbClr val="22282E"/>
-                </a:solidFill>
-              </a:rPr>
-              <a:t>•  devolver el mismo chunk dos veces.</a:t>
-            </a:r>
-          </a:p>
-          <a:p>
-            <a:pPr>
-              <a:spcAft>
-                <a:spcPts val="600"/>
-              </a:spcAft>
-            </a:pPr>
-            <a:r>
-              <a:rPr sz="1500">
-                <a:solidFill>
-                  <a:srgbClr val="22282E"/>
-                </a:solidFill>
-              </a:rPr>
-              <a:t>•  tcache poisoning: sobrescribir el puntero next de un chunk en tcache. Clave: el siguiente</a:t>
+              <a:t>•  El use-after-free (UAF) es hoy una de las vulnerabilidades más explotadas del mundo real</a:t>
+            </a:r>
+          </a:p>
+          <a:p>
+            <a:pPr>
+              <a:spcAft>
+                <a:spcPts val="600"/>
+              </a:spcAft>
+            </a:pPr>
+            <a:r>
+              <a:rPr sz="1500">
+                <a:solidFill>
+                  <a:srgbClr val="22282E"/>
+                </a:solidFill>
+              </a:rPr>
+              <a:t>•  (navegadores, kernels), y su lógica es sutil. Cuando un programa libera memoria con free, el</a:t>
+            </a:r>
+          </a:p>
+          <a:p>
+            <a:pPr>
+              <a:spcAft>
+                <a:spcPts val="600"/>
+              </a:spcAft>
+            </a:pPr>
+            <a:r>
+              <a:rPr sz="1500">
+                <a:solidFill>
+                  <a:srgbClr val="22282E"/>
+                </a:solidFill>
+              </a:rPr>
+              <a:t>•  puntero que apuntaba a ella sigue existiendo —se convierte en un puntero colgante (dangling</a:t>
+            </a:r>
+          </a:p>
+          <a:p>
+            <a:pPr>
+              <a:spcAft>
+                <a:spcPts val="600"/>
+              </a:spcAft>
+            </a:pPr>
+            <a:r>
+              <a:rPr sz="1500">
+                <a:solidFill>
+                  <a:srgbClr val="22282E"/>
+                </a:solidFill>
+              </a:rPr>
+              <a:t>•  pointer)—, pero la memoria ya no le pertenece: el allocator puede reasignarla a otra cosa. Un UAF</a:t>
+            </a:r>
+          </a:p>
+          <a:p>
+            <a:pPr>
+              <a:spcAft>
+                <a:spcPts val="600"/>
+              </a:spcAft>
+            </a:pPr>
+            <a:r>
+              <a:rPr sz="1500">
+                <a:solidFill>
+                  <a:srgbClr val="22282E"/>
+                </a:solidFill>
+              </a:rPr>
+              <a:t>•  ocurre cuando el programa usa ese puntero colgante después del free, accediendo a memoria que</a:t>
+            </a:r>
+          </a:p>
+          <a:p>
+            <a:pPr>
+              <a:spcAft>
+                <a:spcPts val="600"/>
+              </a:spcAft>
+            </a:pPr>
+            <a:r>
+              <a:rPr sz="1500">
+                <a:solidFill>
+                  <a:srgbClr val="22282E"/>
+                </a:solidFill>
+              </a:rPr>
+              <a:t>•  ahora contiene datos distintos. La explotación consiste en un baile de tres pasos: el programa libera</a:t>
+            </a:r>
+          </a:p>
+          <a:p>
+            <a:pPr>
+              <a:spcAft>
+                <a:spcPts val="600"/>
+              </a:spcAft>
+            </a:pPr>
+            <a:r>
+              <a:rPr sz="1500">
+                <a:solidFill>
+                  <a:srgbClr val="22282E"/>
+                </a:solidFill>
+              </a:rPr>
+              <a:t>•  un objeto, el atacante consigue que el allocator reasigne ese mismo chunk a un objeto que él</a:t>
             </a:r>
           </a:p>
         </p:txBody>
@@ -4301,7 +4512,7 @@
                   <a:srgbClr val="0B3D2E"/>
                 </a:solidFill>
               </a:rPr>
-              <a:t>🧰 Herramientas y preparación</a:t>
+              <a:t>📖 Definiciones y características</a:t>
             </a:r>
           </a:p>
         </p:txBody>
@@ -4339,37 +4550,97 @@
                   <a:srgbClr val="22282E"/>
                 </a:solidFill>
               </a:rPr>
-              <a:t>•  pip install pwntools</a:t>
-            </a:r>
-          </a:p>
-          <a:p>
-            <a:pPr>
-              <a:spcAft>
-                <a:spcPts val="600"/>
-              </a:spcAft>
-            </a:pPr>
-            <a:r>
-              <a:rPr sz="1500">
-                <a:solidFill>
-                  <a:srgbClr val="22282E"/>
-                </a:solidFill>
-              </a:rPr>
-              <a:t>•  gcc -fsanitize=address -g uaf.c -o uafasan</a:t>
-            </a:r>
-          </a:p>
-          <a:p>
-            <a:pPr>
-              <a:spcAft>
-                <a:spcPts val="600"/>
-              </a:spcAft>
-            </a:pPr>
-            <a:r>
-              <a:rPr sz="1500">
-                <a:solidFill>
-                  <a:srgbClr val="22282E"/>
-                </a:solidFill>
-              </a:rPr>
-              <a:t>•  ldd --version | head -1     # conocer la versión de glibc y sus mitigaciones</a:t>
+              <a:t>•  Use-after-free: uso de memoria tras free. Clave: CWE-416; si el chunk se reasigna, escribes</a:t>
+            </a:r>
+          </a:p>
+          <a:p>
+            <a:pPr>
+              <a:spcAft>
+                <a:spcPts val="600"/>
+              </a:spcAft>
+            </a:pPr>
+            <a:r>
+              <a:rPr sz="1500">
+                <a:solidFill>
+                  <a:srgbClr val="22282E"/>
+                </a:solidFill>
+              </a:rPr>
+              <a:t>•  sobre otro objeto.</a:t>
+            </a:r>
+          </a:p>
+          <a:p>
+            <a:pPr>
+              <a:spcAft>
+                <a:spcPts val="600"/>
+              </a:spcAft>
+            </a:pPr>
+            <a:r>
+              <a:rPr sz="1500">
+                <a:solidFill>
+                  <a:srgbClr val="22282E"/>
+                </a:solidFill>
+              </a:rPr>
+              <a:t>•  Puntero colgante: referencia que sobrevive al free. Clave: no ponerlo a NULL es la causa</a:t>
+            </a:r>
+          </a:p>
+          <a:p>
+            <a:pPr>
+              <a:spcAft>
+                <a:spcPts val="600"/>
+              </a:spcAft>
+            </a:pPr>
+            <a:r>
+              <a:rPr sz="1500">
+                <a:solidFill>
+                  <a:srgbClr val="22282E"/>
+                </a:solidFill>
+              </a:rPr>
+              <a:t>•  típica.</a:t>
+            </a:r>
+          </a:p>
+          <a:p>
+            <a:pPr>
+              <a:spcAft>
+                <a:spcPts val="600"/>
+              </a:spcAft>
+            </a:pPr>
+            <a:r>
+              <a:rPr sz="1500">
+                <a:solidFill>
+                  <a:srgbClr val="22282E"/>
+                </a:solidFill>
+              </a:rPr>
+              <a:t>•  Double free: liberar dos veces el mismo puntero. Clave: corrompe la lista del bin, permitiendo</a:t>
+            </a:r>
+          </a:p>
+          <a:p>
+            <a:pPr>
+              <a:spcAft>
+                <a:spcPts val="600"/>
+              </a:spcAft>
+            </a:pPr>
+            <a:r>
+              <a:rPr sz="1500">
+                <a:solidFill>
+                  <a:srgbClr val="22282E"/>
+                </a:solidFill>
+              </a:rPr>
+              <a:t>•  devolver el mismo chunk dos veces.</a:t>
+            </a:r>
+          </a:p>
+          <a:p>
+            <a:pPr>
+              <a:spcAft>
+                <a:spcPts val="600"/>
+              </a:spcAft>
+            </a:pPr>
+            <a:r>
+              <a:rPr sz="1500">
+                <a:solidFill>
+                  <a:srgbClr val="22282E"/>
+                </a:solidFill>
+              </a:rPr>
+              <a:t>•  tcache poisoning: sobrescribir el puntero next de un chunk en tcache. Clave: el siguiente</a:t>
             </a:r>
           </a:p>
         </p:txBody>
@@ -4420,7 +4691,7 @@
                   <a:srgbClr val="0B3D2E"/>
                 </a:solidFill>
               </a:rPr>
-              <a:t>🧪 Laboratorio guiado</a:t>
+              <a:t>📔 Glosario</a:t>
             </a:r>
           </a:p>
         </p:txBody>
@@ -4458,97 +4729,97 @@
                   <a:srgbClr val="22282E"/>
                 </a:solidFill>
               </a:rPr>
-              <a:t>•  UAF — programa uaf.c:</a:t>
-            </a:r>
-          </a:p>
-          <a:p>
-            <a:pPr>
-              <a:spcAft>
-                <a:spcPts val="600"/>
-              </a:spcAft>
-            </a:pPr>
-            <a:r>
-              <a:rPr sz="1500">
-                <a:solidFill>
-                  <a:srgbClr val="22282E"/>
-                </a:solidFill>
-              </a:rPr>
-              <a:t>•  int main(){</a:t>
-            </a:r>
-          </a:p>
-          <a:p>
-            <a:pPr>
-              <a:spcAft>
-                <a:spcPts val="600"/>
-              </a:spcAft>
-            </a:pPr>
-            <a:r>
-              <a:rPr sz="1500">
-                <a:solidFill>
-                  <a:srgbClr val="22282E"/>
-                </a:solidFill>
-              </a:rPr>
-              <a:t>•  char a = malloc(0x40);</a:t>
-            </a:r>
-          </a:p>
-          <a:p>
-            <a:pPr>
-              <a:spcAft>
-                <a:spcPts val="600"/>
-              </a:spcAft>
-            </a:pPr>
-            <a:r>
-              <a:rPr sz="1500">
-                <a:solidFill>
-                  <a:srgbClr val="22282E"/>
-                </a:solidFill>
-              </a:rPr>
-              <a:t>•  free(a);                 // a queda colgante</a:t>
-            </a:r>
-          </a:p>
-          <a:p>
-            <a:pPr>
-              <a:spcAft>
-                <a:spcPts val="600"/>
-              </a:spcAft>
-            </a:pPr>
-            <a:r>
-              <a:rPr sz="1500">
-                <a:solidFill>
-                  <a:srgbClr val="22282E"/>
-                </a:solidFill>
-              </a:rPr>
-              <a:t>•  char b = malloc(0x40);  // reutiliza el mismo chunk</a:t>
-            </a:r>
-          </a:p>
-          <a:p>
-            <a:pPr>
-              <a:spcAft>
-                <a:spcPts val="600"/>
-              </a:spcAft>
-            </a:pPr>
-            <a:r>
-              <a:rPr sz="1500">
-                <a:solidFill>
-                  <a:srgbClr val="22282E"/>
-                </a:solidFill>
-              </a:rPr>
-              <a:t>•  strcpy(b, "datos de b");</a:t>
-            </a:r>
-          </a:p>
-          <a:p>
-            <a:pPr>
-              <a:spcAft>
-                <a:spcPts val="600"/>
-              </a:spcAft>
-            </a:pPr>
-            <a:r>
-              <a:rPr sz="1500">
-                <a:solidFill>
-                  <a:srgbClr val="22282E"/>
-                </a:solidFill>
-              </a:rPr>
-              <a:t>•  printf("a ahora lee: %s\n", a);  // UAF: a y b son la misma memoria</a:t>
+              <a:t>•  Término — Definición concisa</a:t>
+            </a:r>
+          </a:p>
+          <a:p>
+            <a:pPr>
+              <a:spcAft>
+                <a:spcPts val="600"/>
+              </a:spcAft>
+            </a:pPr>
+            <a:r>
+              <a:rPr sz="1500">
+                <a:solidFill>
+                  <a:srgbClr val="22282E"/>
+                </a:solidFill>
+              </a:rPr>
+              <a:t>•  Use-after-free (UAF) — Usar un puntero a memoria ya liberada</a:t>
+            </a:r>
+          </a:p>
+          <a:p>
+            <a:pPr>
+              <a:spcAft>
+                <a:spcPts val="600"/>
+              </a:spcAft>
+            </a:pPr>
+            <a:r>
+              <a:rPr sz="1500">
+                <a:solidFill>
+                  <a:srgbClr val="22282E"/>
+                </a:solidFill>
+              </a:rPr>
+              <a:t>•  Puntero colgante — Puntero que sobrevive al free de su memoria</a:t>
+            </a:r>
+          </a:p>
+          <a:p>
+            <a:pPr>
+              <a:spcAft>
+                <a:spcPts val="600"/>
+              </a:spcAft>
+            </a:pPr>
+            <a:r>
+              <a:rPr sz="1500">
+                <a:solidFill>
+                  <a:srgbClr val="22282E"/>
+                </a:solidFill>
+              </a:rPr>
+              <a:t>•  Reasignación — El allocator entrega el chunk liberado a otra petición</a:t>
+            </a:r>
+          </a:p>
+          <a:p>
+            <a:pPr>
+              <a:spcAft>
+                <a:spcPts val="600"/>
+              </a:spcAft>
+            </a:pPr>
+            <a:r>
+              <a:rPr sz="1500">
+                <a:solidFill>
+                  <a:srgbClr val="22282E"/>
+                </a:solidFill>
+              </a:rPr>
+              <a:t>•  Reciclar el chunk — Pedir memoria del mismo tamaño para controlar el contenido</a:t>
+            </a:r>
+          </a:p>
+          <a:p>
+            <a:pPr>
+              <a:spcAft>
+                <a:spcPts val="600"/>
+              </a:spcAft>
+            </a:pPr>
+            <a:r>
+              <a:rPr sz="1500">
+                <a:solidFill>
+                  <a:srgbClr val="22282E"/>
+                </a:solidFill>
+              </a:rPr>
+              <a:t>•  vtable — Tabla de punteros a métodos virtuales de un objeto</a:t>
+            </a:r>
+          </a:p>
+          <a:p>
+            <a:pPr>
+              <a:spcAft>
+                <a:spcPts val="600"/>
+              </a:spcAft>
+            </a:pPr>
+            <a:r>
+              <a:rPr sz="1500">
+                <a:solidFill>
+                  <a:srgbClr val="22282E"/>
+                </a:solidFill>
+              </a:rPr>
+              <a:t>•  Secuestro de vtable — Vtable falsa que redirige una llamada a método</a:t>
             </a:r>
           </a:p>
         </p:txBody>
@@ -4599,7 +4870,7 @@
                   <a:srgbClr val="0B3D2E"/>
                 </a:solidFill>
               </a:rPr>
-              <a:t>✍️ Ejercicios</a:t>
+              <a:t>🧪 Laboratorio guiado</a:t>
             </a:r>
           </a:p>
         </p:txBody>
@@ -4637,82 +4908,97 @@
                   <a:srgbClr val="22282E"/>
                 </a:solidFill>
               </a:rPr>
-              <a:t>•  Corrige el uaf.c poniendo el puntero a NULL tras free y confirma con ASan.</a:t>
-            </a:r>
-          </a:p>
-          <a:p>
-            <a:pPr>
-              <a:spcAft>
-                <a:spcPts val="600"/>
-              </a:spcAft>
-            </a:pPr>
-            <a:r>
-              <a:rPr sz="1500">
-                <a:solidFill>
-                  <a:srgbClr val="22282E"/>
-                </a:solidFill>
-              </a:rPr>
-              <a:t>•  Explica por qué el chunk reasignado solapa los dos punteros.</a:t>
-            </a:r>
-          </a:p>
-          <a:p>
-            <a:pPr>
-              <a:spcAft>
-                <a:spcPts val="600"/>
-              </a:spcAft>
-            </a:pPr>
-            <a:r>
-              <a:rPr sz="1500">
-                <a:solidFill>
-                  <a:srgbClr val="22282E"/>
-                </a:solidFill>
-              </a:rPr>
-              <a:t>•  Realiza tcache poisoning apuntando a una variable global conocida.</a:t>
-            </a:r>
-          </a:p>
-          <a:p>
-            <a:pPr>
-              <a:spcAft>
-                <a:spcPts val="600"/>
-              </a:spcAft>
-            </a:pPr>
-            <a:r>
-              <a:rPr sz="1500">
-                <a:solidFill>
-                  <a:srgbClr val="22282E"/>
-                </a:solidFill>
-              </a:rPr>
-              <a:t>•  Investiga la tcache key y cómo detecta el double free.</a:t>
-            </a:r>
-          </a:p>
-          <a:p>
-            <a:pPr>
-              <a:spcAft>
-                <a:spcPts val="600"/>
-              </a:spcAft>
-            </a:pPr>
-            <a:r>
-              <a:rPr sz="1500">
-                <a:solidFill>
-                  <a:srgbClr val="22282E"/>
-                </a:solidFill>
-              </a:rPr>
-              <a:t>•  Enumera objetivos de escritura viables en tu versión de glibc.</a:t>
-            </a:r>
-          </a:p>
-          <a:p>
-            <a:pPr>
-              <a:spcAft>
-                <a:spcPts val="600"/>
-              </a:spcAft>
-            </a:pPr>
-            <a:r>
-              <a:rPr sz="1500">
-                <a:solidFill>
-                  <a:srgbClr val="22282E"/>
-                </a:solidFill>
-              </a:rPr>
-              <a:t>•  Compara la salida de ASan con la de Valgrind para el mismo UAF.</a:t>
+              <a:t>•  UAF — programa uaf.c:</a:t>
+            </a:r>
+          </a:p>
+          <a:p>
+            <a:pPr>
+              <a:spcAft>
+                <a:spcPts val="600"/>
+              </a:spcAft>
+            </a:pPr>
+            <a:r>
+              <a:rPr sz="1500">
+                <a:solidFill>
+                  <a:srgbClr val="22282E"/>
+                </a:solidFill>
+              </a:rPr>
+              <a:t>•  Ejecuta y observa que a "ve" lo que escribió b.</a:t>
+            </a:r>
+          </a:p>
+          <a:p>
+            <a:pPr>
+              <a:spcAft>
+                <a:spcPts val="600"/>
+              </a:spcAft>
+            </a:pPr>
+            <a:r>
+              <a:rPr sz="1500">
+                <a:solidFill>
+                  <a:srgbClr val="22282E"/>
+                </a:solidFill>
+              </a:rPr>
+              <a:t>•  Detecta el bug con ASan: ./uafasan reporta heap-use-after-free con backtrace.</a:t>
+            </a:r>
+          </a:p>
+          <a:p>
+            <a:pPr>
+              <a:spcAft>
+                <a:spcPts val="600"/>
+              </a:spcAft>
+            </a:pPr>
+            <a:r>
+              <a:rPr sz="1500">
+                <a:solidFill>
+                  <a:srgbClr val="22282E"/>
+                </a:solidFill>
+              </a:rPr>
+              <a:t>•  Double free / tcache poisoning en pwndbg (glibc que lo permita):</a:t>
+            </a:r>
+          </a:p>
+          <a:p>
+            <a:pPr>
+              <a:spcAft>
+                <a:spcPts val="600"/>
+              </a:spcAft>
+            </a:pPr>
+            <a:r>
+              <a:rPr sz="1500">
+                <a:solidFill>
+                  <a:srgbClr val="22282E"/>
+                </a:solidFill>
+              </a:rPr>
+              <a:t>•  Reserva dos chunks del mismo tamaño, libéralos y provoca el double free controlado.</a:t>
+            </a:r>
+          </a:p>
+          <a:p>
+            <a:pPr>
+              <a:spcAft>
+                <a:spcPts val="600"/>
+              </a:spcAft>
+            </a:pPr>
+            <a:r>
+              <a:rPr sz="1500">
+                <a:solidFill>
+                  <a:srgbClr val="22282E"/>
+                </a:solidFill>
+              </a:rPr>
+              <a:t>•  Sobrescribe el next del chunk en tcache con la dirección objetivo:</a:t>
+            </a:r>
+          </a:p>
+          <a:p>
+            <a:pPr>
+              <a:spcAft>
+                <a:spcPts val="600"/>
+              </a:spcAft>
+            </a:pPr>
+            <a:r>
+              <a:rPr sz="1500">
+                <a:solidFill>
+                  <a:srgbClr val="22282E"/>
+                </a:solidFill>
+              </a:rPr>
+              <a:t>•  Escribe en el chunk devuelto para colocar system en freehook (o el equivalente moderno) y</a:t>
             </a:r>
           </a:p>
         </p:txBody>
@@ -4763,7 +5049,7 @@
                   <a:srgbClr val="0B3D2E"/>
                 </a:solidFill>
               </a:rPr>
-              <a:t>📝 Reto verificable</a:t>
+              <a:t>✍️ Ejercicios</a:t>
             </a:r>
           </a:p>
         </p:txBody>
@@ -4801,52 +5087,82 @@
                   <a:srgbClr val="22282E"/>
                 </a:solidFill>
               </a:rPr>
-              <a:t>•  En un binario de reto con UAF/double free, logra que un malloc devuelva una dirección que tú elijas</a:t>
-            </a:r>
-          </a:p>
-          <a:p>
-            <a:pPr>
-              <a:spcAft>
-                <a:spcPts val="600"/>
-              </a:spcAft>
-            </a:pPr>
-            <a:r>
-              <a:rPr sz="1500">
-                <a:solidFill>
-                  <a:srgbClr val="22282E"/>
-                </a:solidFill>
-              </a:rPr>
-              <a:t>•  mediante tcache poisoning.</a:t>
-            </a:r>
-          </a:p>
-          <a:p>
-            <a:pPr>
-              <a:spcAft>
-                <a:spcPts val="600"/>
-              </a:spcAft>
-            </a:pPr>
-            <a:r>
-              <a:rPr sz="1500">
-                <a:solidFill>
-                  <a:srgbClr val="22282E"/>
-                </a:solidFill>
-              </a:rPr>
-              <a:t>•  Criterio de aceptación: demuestras en GDB que un malloc retorna la dirección objetivo, y (si el</a:t>
-            </a:r>
-          </a:p>
-          <a:p>
-            <a:pPr>
-              <a:spcAft>
-                <a:spcPts val="600"/>
-              </a:spcAft>
-            </a:pPr>
-            <a:r>
-              <a:rPr sz="1500">
-                <a:solidFill>
-                  <a:srgbClr val="22282E"/>
-                </a:solidFill>
-              </a:rPr>
-              <a:t>•  reto lo permite) obtienes ejecución de código o lectura de la flag.</a:t>
+              <a:t>•  Corrige el uaf.c poniendo el puntero a NULL tras free y confirma con ASan.</a:t>
+            </a:r>
+          </a:p>
+          <a:p>
+            <a:pPr>
+              <a:spcAft>
+                <a:spcPts val="600"/>
+              </a:spcAft>
+            </a:pPr>
+            <a:r>
+              <a:rPr sz="1500">
+                <a:solidFill>
+                  <a:srgbClr val="22282E"/>
+                </a:solidFill>
+              </a:rPr>
+              <a:t>•  Explica por qué el chunk reasignado solapa los dos punteros.</a:t>
+            </a:r>
+          </a:p>
+          <a:p>
+            <a:pPr>
+              <a:spcAft>
+                <a:spcPts val="600"/>
+              </a:spcAft>
+            </a:pPr>
+            <a:r>
+              <a:rPr sz="1500">
+                <a:solidFill>
+                  <a:srgbClr val="22282E"/>
+                </a:solidFill>
+              </a:rPr>
+              <a:t>•  Realiza tcache poisoning apuntando a una variable global conocida.</a:t>
+            </a:r>
+          </a:p>
+          <a:p>
+            <a:pPr>
+              <a:spcAft>
+                <a:spcPts val="600"/>
+              </a:spcAft>
+            </a:pPr>
+            <a:r>
+              <a:rPr sz="1500">
+                <a:solidFill>
+                  <a:srgbClr val="22282E"/>
+                </a:solidFill>
+              </a:rPr>
+              <a:t>•  Investiga la tcache key y cómo detecta el double free.</a:t>
+            </a:r>
+          </a:p>
+          <a:p>
+            <a:pPr>
+              <a:spcAft>
+                <a:spcPts val="600"/>
+              </a:spcAft>
+            </a:pPr>
+            <a:r>
+              <a:rPr sz="1500">
+                <a:solidFill>
+                  <a:srgbClr val="22282E"/>
+                </a:solidFill>
+              </a:rPr>
+              <a:t>•  Enumera objetivos de escritura viables en tu versión de glibc.</a:t>
+            </a:r>
+          </a:p>
+          <a:p>
+            <a:pPr>
+              <a:spcAft>
+                <a:spcPts val="600"/>
+              </a:spcAft>
+            </a:pPr>
+            <a:r>
+              <a:rPr sz="1500">
+                <a:solidFill>
+                  <a:srgbClr val="22282E"/>
+                </a:solidFill>
+              </a:rPr>
+              <a:t>•  Compara la salida de ASan con la de Valgrind para el mismo UAF.</a:t>
             </a:r>
           </a:p>
         </p:txBody>
